--- a/docs/poster/variants/v07.pptx
+++ b/docs/poster/variants/v07.pptx
@@ -4265,6 +4265,90 @@
               </a:spcAft>
             </a:pPr>
             <a:r>
+              <a:rPr sz="6200" b="1">
+                <a:solidFill>
+                  <a:srgbClr val="8A4B1E"/>
+                </a:solidFill>
+                <a:latin typeface="Times New Roman"/>
+              </a:rPr>
+              <a:t>1,389</a:t>
+            </a:r>
+          </a:p>
+        </p:txBody>
+      </p:sp>
+      <p:sp>
+        <p:nvSpPr>
+          <p:cNvPr id="30" name="TextBox 29"/>
+          <p:cNvSpPr txBox="1"/>
+          <p:nvPr/>
+        </p:nvSpPr>
+        <p:spPr>
+          <a:xfrm>
+            <a:off x="731520" y="11119103"/>
+            <a:ext cx="20482560" cy="365760"/>
+          </a:xfrm>
+          <a:prstGeom prst="rect">
+            <a:avLst/>
+          </a:prstGeom>
+          <a:noFill/>
+        </p:spPr>
+        <p:txBody>
+          <a:bodyPr wrap="square" lIns="0" rIns="0" tIns="0" bIns="0">
+            <a:spAutoFit/>
+          </a:bodyPr>
+          <a:lstStyle/>
+          <a:p>
+            <a:pPr algn="l">
+              <a:lnSpc>
+                <a:spcPct val="122000"/>
+              </a:lnSpc>
+              <a:spcAft>
+                <a:spcPts val="600"/>
+              </a:spcAft>
+            </a:pPr>
+            <a:r>
+              <a:rPr sz="1600" b="0">
+                <a:solidFill>
+                  <a:srgbClr val="6E6759"/>
+                </a:solidFill>
+                <a:latin typeface="Arial"/>
+              </a:rPr>
+              <a:t>joystick commands through the platform</a:t>
+            </a:r>
+          </a:p>
+        </p:txBody>
+      </p:sp>
+      <p:sp>
+        <p:nvSpPr>
+          <p:cNvPr id="31" name="TextBox 30"/>
+          <p:cNvSpPr txBox="1"/>
+          <p:nvPr/>
+        </p:nvSpPr>
+        <p:spPr>
+          <a:xfrm>
+            <a:off x="731520" y="11589511"/>
+            <a:ext cx="20482560" cy="365760"/>
+          </a:xfrm>
+          <a:prstGeom prst="rect">
+            <a:avLst/>
+          </a:prstGeom>
+          <a:noFill/>
+        </p:spPr>
+        <p:txBody>
+          <a:bodyPr wrap="square" lIns="0" rIns="0" tIns="0" bIns="0">
+            <a:spAutoFit/>
+          </a:bodyPr>
+          <a:lstStyle/>
+          <a:p>
+            <a:pPr algn="l">
+              <a:lnSpc>
+                <a:spcPct val="95000"/>
+              </a:lnSpc>
+              <a:spcAft>
+                <a:spcPts val="0"/>
+              </a:spcAft>
+            </a:pPr>
+            <a:r>
               <a:rPr sz="3400" b="1">
                 <a:solidFill>
                   <a:srgbClr val="2B2A26"/>
@@ -4278,13 +4362,13 @@
       </p:sp>
       <p:sp>
         <p:nvSpPr>
-          <p:cNvPr id="30" name="Rectangle 29"/>
+          <p:cNvPr id="32" name="Rectangle 31"/>
           <p:cNvSpPr/>
           <p:nvPr/>
         </p:nvSpPr>
         <p:spPr>
           <a:xfrm>
-            <a:off x="731520" y="10877295"/>
+            <a:off x="731520" y="12150851"/>
             <a:ext cx="20482560" cy="27432"/>
           </a:xfrm>
           <a:prstGeom prst="rect">
@@ -4322,13 +4406,13 @@
       </p:sp>
       <p:sp>
         <p:nvSpPr>
-          <p:cNvPr id="31" name="TextBox 30"/>
+          <p:cNvPr id="33" name="TextBox 32"/>
           <p:cNvSpPr txBox="1"/>
           <p:nvPr/>
         </p:nvSpPr>
         <p:spPr>
           <a:xfrm>
-            <a:off x="731520" y="11206479"/>
+            <a:off x="731520" y="12480035"/>
             <a:ext cx="20482560" cy="365760"/>
           </a:xfrm>
           <a:prstGeom prst="rect">
@@ -4364,13 +4448,13 @@
       </p:sp>
       <p:sp>
         <p:nvSpPr>
-          <p:cNvPr id="32" name="TextBox 31"/>
+          <p:cNvPr id="34" name="TextBox 33"/>
           <p:cNvSpPr txBox="1"/>
           <p:nvPr/>
         </p:nvSpPr>
         <p:spPr>
           <a:xfrm>
-            <a:off x="731520" y="12697967"/>
+            <a:off x="731520" y="13971523"/>
             <a:ext cx="20482560" cy="365760"/>
           </a:xfrm>
           <a:prstGeom prst="rect">
@@ -4406,13 +4490,13 @@
       </p:sp>
       <p:sp>
         <p:nvSpPr>
-          <p:cNvPr id="33" name="Rectangle 32"/>
+          <p:cNvPr id="35" name="Rectangle 34"/>
           <p:cNvSpPr/>
           <p:nvPr/>
         </p:nvSpPr>
         <p:spPr>
           <a:xfrm>
-            <a:off x="731520" y="13259307"/>
+            <a:off x="731520" y="14532863"/>
             <a:ext cx="20482560" cy="27432"/>
           </a:xfrm>
           <a:prstGeom prst="rect">
@@ -4450,7 +4534,7 @@
       </p:sp>
       <p:pic>
         <p:nvPicPr>
-          <p:cNvPr id="34" name="Picture 33" descr="f_rounds.png"/>
+          <p:cNvPr id="36" name="Picture 35" descr="f_rounds.png"/>
           <p:cNvPicPr>
             <a:picLocks noChangeAspect="1"/>
           </p:cNvPicPr>
@@ -4464,7 +4548,7 @@
         </p:blipFill>
         <p:spPr>
           <a:xfrm>
-            <a:off x="731520" y="13588491"/>
+            <a:off x="731520" y="14862047"/>
             <a:ext cx="20482560" cy="4663440"/>
           </a:xfrm>
           <a:prstGeom prst="rect">
@@ -4474,13 +4558,13 @@
       </p:pic>
       <p:sp>
         <p:nvSpPr>
-          <p:cNvPr id="35" name="TextBox 34"/>
+          <p:cNvPr id="37" name="TextBox 36"/>
           <p:cNvSpPr txBox="1"/>
           <p:nvPr/>
         </p:nvSpPr>
         <p:spPr>
           <a:xfrm>
-            <a:off x="731520" y="18361659"/>
+            <a:off x="731520" y="19635216"/>
             <a:ext cx="20482560" cy="365760"/>
           </a:xfrm>
           <a:prstGeom prst="rect">
@@ -4516,13 +4600,13 @@
       </p:sp>
       <p:sp>
         <p:nvSpPr>
-          <p:cNvPr id="36" name="TextBox 35"/>
+          <p:cNvPr id="38" name="TextBox 37"/>
           <p:cNvSpPr txBox="1"/>
           <p:nvPr/>
         </p:nvSpPr>
         <p:spPr>
           <a:xfrm>
-            <a:off x="731520" y="19391883"/>
+            <a:off x="731520" y="20665439"/>
             <a:ext cx="20482560" cy="365760"/>
           </a:xfrm>
           <a:prstGeom prst="rect">
@@ -4558,14 +4642,14 @@
       </p:sp>
       <p:sp>
         <p:nvSpPr>
-          <p:cNvPr id="37" name="TextBox 36"/>
+          <p:cNvPr id="39" name="TextBox 38"/>
           <p:cNvSpPr txBox="1"/>
           <p:nvPr/>
         </p:nvSpPr>
         <p:spPr>
           <a:xfrm>
-            <a:off x="731520" y="20883371"/>
-            <a:ext cx="20482560" cy="365760"/>
+            <a:off x="21579840" y="7933943"/>
+            <a:ext cx="10607040" cy="365760"/>
           </a:xfrm>
           <a:prstGeom prst="rect">
             <a:avLst/>
@@ -4593,21 +4677,21 @@
                 </a:solidFill>
                 <a:latin typeface="Times New Roman"/>
               </a:rPr>
-              <a:t>Everything we trained, ran, or rejected</a:t>
-            </a:r>
-          </a:p>
-        </p:txBody>
-      </p:sp>
-      <p:sp>
-        <p:nvSpPr>
-          <p:cNvPr id="38" name="Rectangle 37"/>
+              <a:t>Robots on the platform today</a:t>
+            </a:r>
+          </a:p>
+        </p:txBody>
+      </p:sp>
+      <p:sp>
+        <p:nvSpPr>
+          <p:cNvPr id="40" name="Rectangle 39"/>
           <p:cNvSpPr/>
           <p:nvPr/>
         </p:nvSpPr>
         <p:spPr>
           <a:xfrm>
-            <a:off x="731520" y="21444711"/>
-            <a:ext cx="20482560" cy="27432"/>
+            <a:off x="21579840" y="8495284"/>
+            <a:ext cx="10607040" cy="27432"/>
           </a:xfrm>
           <a:prstGeom prst="rect">
             <a:avLst/>
@@ -4642,72 +4726,6 @@
           </a:p>
         </p:txBody>
       </p:sp>
-      <p:pic>
-        <p:nvPicPr>
-          <p:cNvPr id="39" name="Picture 38" descr="m_ledger.png"/>
-          <p:cNvPicPr>
-            <a:picLocks noChangeAspect="1"/>
-          </p:cNvPicPr>
-          <p:nvPr/>
-        </p:nvPicPr>
-        <p:blipFill>
-          <a:blip r:embed="rId3"/>
-          <a:stretch>
-            <a:fillRect/>
-          </a:stretch>
-        </p:blipFill>
-        <p:spPr>
-          <a:xfrm>
-            <a:off x="731520" y="21773895"/>
-            <a:ext cx="20482560" cy="3749040"/>
-          </a:xfrm>
-          <a:prstGeom prst="rect">
-            <a:avLst/>
-          </a:prstGeom>
-        </p:spPr>
-      </p:pic>
-      <p:sp>
-        <p:nvSpPr>
-          <p:cNvPr id="40" name="TextBox 39"/>
-          <p:cNvSpPr txBox="1"/>
-          <p:nvPr/>
-        </p:nvSpPr>
-        <p:spPr>
-          <a:xfrm>
-            <a:off x="731520" y="25632663"/>
-            <a:ext cx="20482560" cy="365760"/>
-          </a:xfrm>
-          <a:prstGeom prst="rect">
-            <a:avLst/>
-          </a:prstGeom>
-          <a:noFill/>
-        </p:spPr>
-        <p:txBody>
-          <a:bodyPr wrap="square" lIns="0" rIns="0" tIns="0" bIns="0">
-            <a:spAutoFit/>
-          </a:bodyPr>
-          <a:lstStyle/>
-          <a:p>
-            <a:pPr algn="l">
-              <a:lnSpc>
-                <a:spcPct val="118000"/>
-              </a:lnSpc>
-              <a:spcAft>
-                <a:spcPts val="0"/>
-              </a:spcAft>
-            </a:pPr>
-            <a:r>
-              <a:rPr sz="1600" b="0">
-                <a:solidFill>
-                  <a:srgbClr val="6E6759"/>
-                </a:solidFill>
-                <a:latin typeface="Arial"/>
-              </a:rPr>
-              <a:t>Figure 2.  30 rows in four families, which is 27 distinct models: OWLv2-large and Qwen2.5-7B each appear twice because each does two jobs here. One model is deployed. The zero-shot column is a single deterministic pass per model with no repeats, scored as mAP50 on the 848-image split; the reviewer column is the 149-case dev split, and two of its arms are still running. RF-DETR's score is on a third scale and is never differenced against the rows above it: the one measured offset between two of our evaluators, 0.0239, is larger than the gap on display.</a:t>
-            </a:r>
-          </a:p>
-        </p:txBody>
-      </p:sp>
       <p:sp>
         <p:nvSpPr>
           <p:cNvPr id="41" name="TextBox 40"/>
@@ -4716,8 +4734,8 @@
         </p:nvSpPr>
         <p:spPr>
           <a:xfrm>
-            <a:off x="731520" y="26662887"/>
-            <a:ext cx="20482560" cy="365760"/>
+            <a:off x="21579840" y="8824467"/>
+            <a:ext cx="10607040" cy="365760"/>
           </a:xfrm>
           <a:prstGeom prst="rect">
             <a:avLst/>
@@ -4745,7 +4763,7 @@
                 </a:solidFill>
                 <a:latin typeface="Arial"/>
               </a:rPr>
-              <a:t>Thirty rows in four families, which is 27 distinct models. Five detectors trained on our own holdout, two vision models inside the loop, fourteen vision-language models zero-shot, and nine language models as reviewers. One is deployed.</a:t>
+              <a:t>Robot 241 is a tracked rover that drives crop rows and streams camera, GPS and two IMUs. The laser cart carries the weeder: a galvanometer laser, a down camera over the work zone and a forward camera. Ten projects sit on the platform and two of them have a robot reporting into them. Between those two vehicles, 2,686 frames in 26 drives.</a:t>
             </a:r>
           </a:p>
         </p:txBody>
@@ -4758,7 +4776,7 @@
         </p:nvSpPr>
         <p:spPr>
           <a:xfrm>
-            <a:off x="21579840" y="7933943"/>
+            <a:off x="21579840" y="10935716"/>
             <a:ext cx="10607040" cy="365760"/>
           </a:xfrm>
           <a:prstGeom prst="rect">
@@ -4781,26 +4799,110 @@
               </a:spcAft>
             </a:pPr>
             <a:r>
-              <a:rPr sz="3400" b="1">
-                <a:solidFill>
-                  <a:srgbClr val="2B2A26"/>
+              <a:rPr sz="6200" b="1">
+                <a:solidFill>
+                  <a:srgbClr val="8A4B1E"/>
                 </a:solidFill>
                 <a:latin typeface="Times New Roman"/>
               </a:rPr>
-              <a:t>Robots on the platform today</a:t>
-            </a:r>
-          </a:p>
-        </p:txBody>
-      </p:sp>
-      <p:sp>
-        <p:nvSpPr>
-          <p:cNvPr id="43" name="Rectangle 42"/>
+              <a:t>14</a:t>
+            </a:r>
+          </a:p>
+        </p:txBody>
+      </p:sp>
+      <p:sp>
+        <p:nvSpPr>
+          <p:cNvPr id="43" name="TextBox 42"/>
+          <p:cNvSpPr txBox="1"/>
+          <p:nvPr/>
+        </p:nvSpPr>
+        <p:spPr>
+          <a:xfrm>
+            <a:off x="21579840" y="11738864"/>
+            <a:ext cx="10607040" cy="365760"/>
+          </a:xfrm>
+          <a:prstGeom prst="rect">
+            <a:avLst/>
+          </a:prstGeom>
+          <a:noFill/>
+        </p:spPr>
+        <p:txBody>
+          <a:bodyPr wrap="square" lIns="0" rIns="0" tIns="0" bIns="0">
+            <a:spAutoFit/>
+          </a:bodyPr>
+          <a:lstStyle/>
+          <a:p>
+            <a:pPr algn="l">
+              <a:lnSpc>
+                <a:spcPct val="122000"/>
+              </a:lnSpc>
+              <a:spcAft>
+                <a:spcPts val="600"/>
+              </a:spcAft>
+            </a:pPr>
+            <a:r>
+              <a:rPr sz="1600" b="0">
+                <a:solidFill>
+                  <a:srgbClr val="6E6759"/>
+                </a:solidFill>
+                <a:latin typeface="Arial"/>
+              </a:rPr>
+              <a:t>analysis tools the planner can choose from</a:t>
+            </a:r>
+          </a:p>
+        </p:txBody>
+      </p:sp>
+      <p:sp>
+        <p:nvSpPr>
+          <p:cNvPr id="44" name="TextBox 43"/>
+          <p:cNvSpPr txBox="1"/>
+          <p:nvPr/>
+        </p:nvSpPr>
+        <p:spPr>
+          <a:xfrm>
+            <a:off x="21579840" y="12209272"/>
+            <a:ext cx="10607040" cy="365760"/>
+          </a:xfrm>
+          <a:prstGeom prst="rect">
+            <a:avLst/>
+          </a:prstGeom>
+          <a:noFill/>
+        </p:spPr>
+        <p:txBody>
+          <a:bodyPr wrap="square" lIns="0" rIns="0" tIns="0" bIns="0">
+            <a:spAutoFit/>
+          </a:bodyPr>
+          <a:lstStyle/>
+          <a:p>
+            <a:pPr algn="l">
+              <a:lnSpc>
+                <a:spcPct val="95000"/>
+              </a:lnSpc>
+              <a:spcAft>
+                <a:spcPts val="0"/>
+              </a:spcAft>
+            </a:pPr>
+            <a:r>
+              <a:rPr sz="3400" b="1">
+                <a:solidFill>
+                  <a:srgbClr val="2B2A26"/>
+                </a:solidFill>
+                <a:latin typeface="Times New Roman"/>
+              </a:rPr>
+              <a:t>Ask a dataset what it is good for</a:t>
+            </a:r>
+          </a:p>
+        </p:txBody>
+      </p:sp>
+      <p:sp>
+        <p:nvSpPr>
+          <p:cNvPr id="45" name="Rectangle 44"/>
           <p:cNvSpPr/>
           <p:nvPr/>
         </p:nvSpPr>
         <p:spPr>
           <a:xfrm>
-            <a:off x="21579840" y="8495284"/>
+            <a:off x="21579840" y="12770612"/>
             <a:ext cx="10607040" cy="27432"/>
           </a:xfrm>
           <a:prstGeom prst="rect">
@@ -4838,13 +4940,13 @@
       </p:sp>
       <p:sp>
         <p:nvSpPr>
-          <p:cNvPr id="44" name="TextBox 43"/>
+          <p:cNvPr id="46" name="TextBox 45"/>
           <p:cNvSpPr txBox="1"/>
           <p:nvPr/>
         </p:nvSpPr>
         <p:spPr>
           <a:xfrm>
-            <a:off x="21579840" y="8824467"/>
+            <a:off x="21579840" y="13099796"/>
             <a:ext cx="10607040" cy="365760"/>
           </a:xfrm>
           <a:prstGeom prst="rect">
@@ -4873,20 +4975,20 @@
                 </a:solidFill>
                 <a:latin typeface="Arial"/>
               </a:rPr>
-              <a:t>Robot 241 is a tracked rover that drives crop rows and streams camera, GPS and two IMUs. The laser cart carries the weeder: a galvanometer laser, a down camera over the work zone and a forward camera. A Unitree humanoid has a project and has uploaded nothing yet. Between them the two ground vehicles have recorded 2,686 frames in 26 drives.</a:t>
-            </a:r>
-          </a:p>
-        </p:txBody>
-      </p:sp>
-      <p:sp>
-        <p:nvSpPr>
-          <p:cNvPr id="45" name="TextBox 44"/>
+              <a:t>Every dataset page carries a chat box. A user types or speaks a plain question about that dataset. A planner reads the question and the dataset's real column profile, then picks from 14 fixed analysis tools or writes new code. The answer comes back with the chart and the code that produced it.</a:t>
+            </a:r>
+          </a:p>
+        </p:txBody>
+      </p:sp>
+      <p:sp>
+        <p:nvSpPr>
+          <p:cNvPr id="47" name="TextBox 46"/>
           <p:cNvSpPr txBox="1"/>
           <p:nvPr/>
         </p:nvSpPr>
         <p:spPr>
           <a:xfrm>
-            <a:off x="21579840" y="10935716"/>
+            <a:off x="21579840" y="14901164"/>
             <a:ext cx="10607040" cy="365760"/>
           </a:xfrm>
           <a:prstGeom prst="rect">
@@ -4915,20 +5017,20 @@
                 </a:solidFill>
                 <a:latin typeface="Times New Roman"/>
               </a:rPr>
-              <a:t>Ask a dataset what it is good for</a:t>
-            </a:r>
-          </a:p>
-        </p:txBody>
-      </p:sp>
-      <p:sp>
-        <p:nvSpPr>
-          <p:cNvPr id="46" name="Rectangle 45"/>
+              <a:t>On disk today</a:t>
+            </a:r>
+          </a:p>
+        </p:txBody>
+      </p:sp>
+      <p:sp>
+        <p:nvSpPr>
+          <p:cNvPr id="48" name="Rectangle 47"/>
           <p:cNvSpPr/>
           <p:nvPr/>
         </p:nvSpPr>
         <p:spPr>
           <a:xfrm>
-            <a:off x="21579840" y="11497056"/>
+            <a:off x="21579840" y="15462504"/>
             <a:ext cx="10607040" cy="27432"/>
           </a:xfrm>
           <a:prstGeom prst="rect">
@@ -4966,13 +5068,13 @@
       </p:sp>
       <p:sp>
         <p:nvSpPr>
-          <p:cNvPr id="47" name="TextBox 46"/>
+          <p:cNvPr id="49" name="TextBox 48"/>
           <p:cNvSpPr txBox="1"/>
           <p:nvPr/>
         </p:nvSpPr>
         <p:spPr>
           <a:xfrm>
-            <a:off x="21579840" y="11826239"/>
+            <a:off x="21579840" y="15791688"/>
             <a:ext cx="10607040" cy="365760"/>
           </a:xfrm>
           <a:prstGeom prst="rect">
@@ -5001,20 +5103,20 @@
                 </a:solidFill>
                 <a:latin typeface="Arial"/>
               </a:rPr>
-              <a:t>Every dataset page carries a chat box. A user types or speaks a plain question about that dataset. A planner reads the question and the dataset's real column profile, then picks from 14 fixed analysis tools or writes new code. The answer comes back with the chart and the code that produced it.</a:t>
-            </a:r>
-          </a:p>
-        </p:txBody>
-      </p:sp>
-      <p:sp>
-        <p:nvSpPr>
-          <p:cNvPr id="48" name="TextBox 47"/>
+              <a:t>Two robots have put 2,686 camera frames and 91,955 telemetry rows across nine streams onto the platform, over 26 drives, with 342 m of GPS track from 1,502 fixes. None of the frames is labelled.</a:t>
+            </a:r>
+          </a:p>
+        </p:txBody>
+      </p:sp>
+      <p:sp>
+        <p:nvSpPr>
+          <p:cNvPr id="50" name="TextBox 49"/>
           <p:cNvSpPr txBox="1"/>
           <p:nvPr/>
         </p:nvSpPr>
         <p:spPr>
           <a:xfrm>
-            <a:off x="21579840" y="13627607"/>
+            <a:off x="21579840" y="17283176"/>
             <a:ext cx="10607040" cy="365760"/>
           </a:xfrm>
           <a:prstGeom prst="rect">
@@ -5037,26 +5139,110 @@
               </a:spcAft>
             </a:pPr>
             <a:r>
-              <a:rPr sz="3400" b="1">
-                <a:solidFill>
-                  <a:srgbClr val="2B2A26"/>
+              <a:rPr sz="6200" b="1">
+                <a:solidFill>
+                  <a:srgbClr val="8A4B1E"/>
                 </a:solidFill>
                 <a:latin typeface="Times New Roman"/>
               </a:rPr>
-              <a:t>On disk today</a:t>
-            </a:r>
-          </a:p>
-        </p:txBody>
-      </p:sp>
-      <p:sp>
-        <p:nvSpPr>
-          <p:cNvPr id="49" name="Rectangle 48"/>
+              <a:t>92</a:t>
+            </a:r>
+          </a:p>
+        </p:txBody>
+      </p:sp>
+      <p:sp>
+        <p:nvSpPr>
+          <p:cNvPr id="51" name="TextBox 50"/>
+          <p:cNvSpPr txBox="1"/>
+          <p:nvPr/>
+        </p:nvSpPr>
+        <p:spPr>
+          <a:xfrm>
+            <a:off x="21579840" y="18086324"/>
+            <a:ext cx="10607040" cy="365760"/>
+          </a:xfrm>
+          <a:prstGeom prst="rect">
+            <a:avLst/>
+          </a:prstGeom>
+          <a:noFill/>
+        </p:spPr>
+        <p:txBody>
+          <a:bodyPr wrap="square" lIns="0" rIns="0" tIns="0" bIns="0">
+            <a:spAutoFit/>
+          </a:bodyPr>
+          <a:lstStyle/>
+          <a:p>
+            <a:pPr algn="l">
+              <a:lnSpc>
+                <a:spcPct val="122000"/>
+              </a:lnSpc>
+              <a:spcAft>
+                <a:spcPts val="600"/>
+              </a:spcAft>
+            </a:pPr>
+            <a:r>
+              <a:rPr sz="1600" b="0">
+                <a:solidFill>
+                  <a:srgbClr val="6E6759"/>
+                </a:solidFill>
+                <a:latin typeface="Arial"/>
+              </a:rPr>
+              <a:t>questions asked of a dataset so far</a:t>
+            </a:r>
+          </a:p>
+        </p:txBody>
+      </p:sp>
+      <p:sp>
+        <p:nvSpPr>
+          <p:cNvPr id="52" name="TextBox 51"/>
+          <p:cNvSpPr txBox="1"/>
+          <p:nvPr/>
+        </p:nvSpPr>
+        <p:spPr>
+          <a:xfrm>
+            <a:off x="21579840" y="18556732"/>
+            <a:ext cx="10607040" cy="365760"/>
+          </a:xfrm>
+          <a:prstGeom prst="rect">
+            <a:avLst/>
+          </a:prstGeom>
+          <a:noFill/>
+        </p:spPr>
+        <p:txBody>
+          <a:bodyPr wrap="square" lIns="0" rIns="0" tIns="0" bIns="0">
+            <a:spAutoFit/>
+          </a:bodyPr>
+          <a:lstStyle/>
+          <a:p>
+            <a:pPr algn="l">
+              <a:lnSpc>
+                <a:spcPct val="95000"/>
+              </a:lnSpc>
+              <a:spcAft>
+                <a:spcPts val="0"/>
+              </a:spcAft>
+            </a:pPr>
+            <a:r>
+              <a:rPr sz="3400" b="1">
+                <a:solidFill>
+                  <a:srgbClr val="2B2A26"/>
+                </a:solidFill>
+                <a:latin typeface="Times New Roman"/>
+              </a:rPr>
+              <a:t>Asked something it had never seen</a:t>
+            </a:r>
+          </a:p>
+        </p:txBody>
+      </p:sp>
+      <p:sp>
+        <p:nvSpPr>
+          <p:cNvPr id="53" name="Rectangle 52"/>
           <p:cNvSpPr/>
           <p:nvPr/>
         </p:nvSpPr>
         <p:spPr>
           <a:xfrm>
-            <a:off x="21579840" y="14188947"/>
+            <a:off x="21579840" y="19118072"/>
             <a:ext cx="10607040" cy="27432"/>
           </a:xfrm>
           <a:prstGeom prst="rect">
@@ -5094,13 +5280,13 @@
       </p:sp>
       <p:sp>
         <p:nvSpPr>
-          <p:cNvPr id="50" name="TextBox 49"/>
+          <p:cNvPr id="54" name="TextBox 53"/>
           <p:cNvSpPr txBox="1"/>
           <p:nvPr/>
         </p:nvSpPr>
         <p:spPr>
           <a:xfrm>
-            <a:off x="21579840" y="14518131"/>
+            <a:off x="21579840" y="19447256"/>
             <a:ext cx="10607040" cy="365760"/>
           </a:xfrm>
           <a:prstGeom prst="rect">
@@ -5129,20 +5315,20 @@
                 </a:solidFill>
                 <a:latin typeface="Arial"/>
               </a:rPr>
-              <a:t>Two robots have put 2,686 camera frames and 91,955 telemetry rows across nine streams onto the platform, over 26 drives, with 342 m of GPS track from 1,502 fixes. None of the frames is labelled.</a:t>
-            </a:r>
-          </a:p>
-        </p:txBody>
-      </p:sp>
-      <p:sp>
-        <p:nvSpPr>
-          <p:cNvPr id="51" name="TextBox 50"/>
+              <a:t>Asked to plot a histogram of the heading change rate on the 241 field drive, the agent wrote the code and returned the plot on the first attempt. A fixed template cannot do that, because nothing in the platform knew that question would be asked. Across the platform, 9 datasets carry 92 turns of that conversation.</a:t>
+            </a:r>
+          </a:p>
+        </p:txBody>
+      </p:sp>
+      <p:sp>
+        <p:nvSpPr>
+          <p:cNvPr id="55" name="TextBox 54"/>
           <p:cNvSpPr txBox="1"/>
           <p:nvPr/>
         </p:nvSpPr>
         <p:spPr>
           <a:xfrm>
-            <a:off x="21579840" y="16009620"/>
+            <a:off x="21579840" y="21248624"/>
             <a:ext cx="10607040" cy="365760"/>
           </a:xfrm>
           <a:prstGeom prst="rect">
@@ -5171,20 +5357,20 @@
                 </a:solidFill>
                 <a:latin typeface="Times New Roman"/>
               </a:rPr>
-              <a:t>Asked something it had never seen</a:t>
-            </a:r>
-          </a:p>
-        </p:txBody>
-      </p:sp>
-      <p:sp>
-        <p:nvSpPr>
-          <p:cNvPr id="52" name="Rectangle 51"/>
+              <a:t>More web data, less accuracy</a:t>
+            </a:r>
+          </a:p>
+        </p:txBody>
+      </p:sp>
+      <p:sp>
+        <p:nvSpPr>
+          <p:cNvPr id="56" name="Rectangle 55"/>
           <p:cNvSpPr/>
           <p:nvPr/>
         </p:nvSpPr>
         <p:spPr>
           <a:xfrm>
-            <a:off x="21579840" y="16570959"/>
+            <a:off x="21579840" y="21809964"/>
             <a:ext cx="10607040" cy="27432"/>
           </a:xfrm>
           <a:prstGeom prst="rect">
@@ -5222,13 +5408,13 @@
       </p:sp>
       <p:sp>
         <p:nvSpPr>
-          <p:cNvPr id="53" name="TextBox 52"/>
+          <p:cNvPr id="57" name="TextBox 56"/>
           <p:cNvSpPr txBox="1"/>
           <p:nvPr/>
         </p:nvSpPr>
         <p:spPr>
           <a:xfrm>
-            <a:off x="21579840" y="16900143"/>
+            <a:off x="21579840" y="22139148"/>
             <a:ext cx="10607040" cy="365760"/>
           </a:xfrm>
           <a:prstGeom prst="rect">
@@ -5257,20 +5443,20 @@
                 </a:solidFill>
                 <a:latin typeface="Arial"/>
               </a:rPr>
-              <a:t>Asked to plot a histogram of the heading change rate on the 241 field drive, the agent wrote the code and returned the plot on the first attempt. A fixed template cannot do that, because nothing in the platform knew that question would be asked. Across the platform, 9 datasets carry 92 turns of that conversation.</a:t>
-            </a:r>
-          </a:p>
-        </p:txBody>
-      </p:sp>
-      <p:sp>
-        <p:nvSpPr>
-          <p:cNvPr id="54" name="TextBox 53"/>
+              <a:t>Twelve times the training data costs 0.0189 on our own 1,977-image holdout, three seeds at every rung, which is 8.2 times the seed spread. The same eight checkpoints fall on a second weed dataset too. One of six audited web sources reaches a 0.90 label-precision bar.</a:t>
+            </a:r>
+          </a:p>
+        </p:txBody>
+      </p:sp>
+      <p:sp>
+        <p:nvSpPr>
+          <p:cNvPr id="58" name="TextBox 57"/>
           <p:cNvSpPr txBox="1"/>
           <p:nvPr/>
         </p:nvSpPr>
         <p:spPr>
           <a:xfrm>
-            <a:off x="21579840" y="18701512"/>
+            <a:off x="32552640" y="7933943"/>
             <a:ext cx="10607040" cy="365760"/>
           </a:xfrm>
           <a:prstGeom prst="rect">
@@ -5299,20 +5485,20 @@
                 </a:solidFill>
                 <a:latin typeface="Times New Roman"/>
               </a:rPr>
-              <a:t>More web data, less accuracy</a:t>
-            </a:r>
-          </a:p>
-        </p:txBody>
-      </p:sp>
-      <p:sp>
-        <p:nvSpPr>
-          <p:cNvPr id="55" name="Rectangle 54"/>
+              <a:t>A drive becomes a dataset as it opens</a:t>
+            </a:r>
+          </a:p>
+        </p:txBody>
+      </p:sp>
+      <p:sp>
+        <p:nvSpPr>
+          <p:cNvPr id="59" name="Rectangle 58"/>
           <p:cNvSpPr/>
           <p:nvPr/>
         </p:nvSpPr>
         <p:spPr>
           <a:xfrm>
-            <a:off x="21579840" y="19262852"/>
+            <a:off x="32552640" y="8495284"/>
             <a:ext cx="10607040" cy="27432"/>
           </a:xfrm>
           <a:prstGeom prst="rect">
@@ -5350,13 +5536,13 @@
       </p:sp>
       <p:sp>
         <p:nvSpPr>
-          <p:cNvPr id="56" name="TextBox 55"/>
+          <p:cNvPr id="60" name="TextBox 59"/>
           <p:cNvSpPr txBox="1"/>
           <p:nvPr/>
         </p:nvSpPr>
         <p:spPr>
           <a:xfrm>
-            <a:off x="21579840" y="19592036"/>
+            <a:off x="32552640" y="8824467"/>
             <a:ext cx="10607040" cy="365760"/>
           </a:xfrm>
           <a:prstGeom prst="rect">
@@ -5385,20 +5571,20 @@
                 </a:solidFill>
                 <a:latin typeface="Arial"/>
               </a:rPr>
-              <a:t>Twelve times the training data costs 0.0189 on our own 1,977-image holdout, three seeds at every rung, which is 8.2 times the seed spread. The same eight checkpoints fall on a second weed dataset too. One of six audited web sources reaches a 0.90 label-precision bar.</a:t>
-            </a:r>
-          </a:p>
-        </p:txBody>
-      </p:sp>
-      <p:sp>
-        <p:nvSpPr>
-          <p:cNvPr id="57" name="TextBox 56"/>
+              <a:t>A vehicle opens a session and the platform registers it as a governed dataset at that moment, not after the drive ends. Frames and sensor batches arrive over one API key. Robot 241 sends camera, GPS and two IMUs; the laser cart sends camera, laser state, vehicle telemetry and its own detections, and no position at all.</a:t>
+            </a:r>
+          </a:p>
+        </p:txBody>
+      </p:sp>
+      <p:sp>
+        <p:nvSpPr>
+          <p:cNvPr id="61" name="TextBox 60"/>
           <p:cNvSpPr txBox="1"/>
           <p:nvPr/>
         </p:nvSpPr>
         <p:spPr>
           <a:xfrm>
-            <a:off x="21579840" y="21393404"/>
+            <a:off x="32552640" y="10625835"/>
             <a:ext cx="10607040" cy="365760"/>
           </a:xfrm>
           <a:prstGeom prst="rect">
@@ -5427,20 +5613,20 @@
                 </a:solidFill>
                 <a:latin typeface="Times New Roman"/>
               </a:rPr>
-              <a:t>213 seconds in one crop plot</a:t>
-            </a:r>
-          </a:p>
-        </p:txBody>
-      </p:sp>
-      <p:sp>
-        <p:nvSpPr>
-          <p:cNvPr id="58" name="Rectangle 57"/>
+              <a:t>Four frames, as recorded</a:t>
+            </a:r>
+          </a:p>
+        </p:txBody>
+      </p:sp>
+      <p:sp>
+        <p:nvSpPr>
+          <p:cNvPr id="62" name="Rectangle 61"/>
           <p:cNvSpPr/>
           <p:nvPr/>
         </p:nvSpPr>
         <p:spPr>
           <a:xfrm>
-            <a:off x="21579840" y="21954744"/>
+            <a:off x="32552640" y="11187175"/>
             <a:ext cx="10607040" cy="27432"/>
           </a:xfrm>
           <a:prstGeom prst="rect">
@@ -5478,22 +5664,22 @@
       </p:sp>
       <p:pic>
         <p:nvPicPr>
-          <p:cNvPr id="59" name="Picture 58" descr="h_drive.png"/>
+          <p:cNvPr id="63" name="Picture 62" descr="l_robots.png"/>
           <p:cNvPicPr>
             <a:picLocks noChangeAspect="1"/>
           </p:cNvPicPr>
           <p:nvPr/>
         </p:nvPicPr>
         <p:blipFill>
-          <a:blip r:embed="rId4"/>
+          <a:blip r:embed="rId3"/>
           <a:stretch>
             <a:fillRect/>
           </a:stretch>
         </p:blipFill>
         <p:spPr>
           <a:xfrm>
-            <a:off x="21579840" y="22283928"/>
-            <a:ext cx="10607040" cy="4023360"/>
+            <a:off x="32552640" y="11516359"/>
+            <a:ext cx="10607040" cy="2377440"/>
           </a:xfrm>
           <a:prstGeom prst="rect">
             <a:avLst/>
@@ -5502,13 +5688,13 @@
       </p:pic>
       <p:sp>
         <p:nvSpPr>
-          <p:cNvPr id="60" name="TextBox 59"/>
+          <p:cNvPr id="64" name="TextBox 63"/>
           <p:cNvSpPr txBox="1"/>
           <p:nvPr/>
         </p:nvSpPr>
         <p:spPr>
           <a:xfrm>
-            <a:off x="21579840" y="26417016"/>
+            <a:off x="32552640" y="14003527"/>
             <a:ext cx="10607040" cy="365760"/>
           </a:xfrm>
           <a:prstGeom prst="rect">
@@ -5537,20 +5723,20 @@
                 </a:solidFill>
                 <a:latin typeface="Arial"/>
               </a:rPr>
-              <a:t>Figure 3.  Robot 241, 2026-08-29: one 213 s pass through a crop plot. (h) GPS track from the board fix. (i) IMU heading over the same pass.</a:t>
-            </a:r>
-          </a:p>
-        </p:txBody>
-      </p:sp>
-      <p:sp>
-        <p:nvSpPr>
-          <p:cNvPr id="61" name="TextBox 60"/>
+              <a:t>Figure 2.  Frames as recorded, unenhanced. Robot 241 has sent 2,238 frames at 640 x 360 and 1 Hz, the laser cart 427, and 75 of the cart's were taken in a field. None of the 2,686 is labelled. The rectangle in the down camera is the cart's fixed work-zone overlay. It is drawn on every frame, including the ones with no vegetation in them.</a:t>
+            </a:r>
+          </a:p>
+        </p:txBody>
+      </p:sp>
+      <p:sp>
+        <p:nvSpPr>
+          <p:cNvPr id="65" name="TextBox 64"/>
           <p:cNvSpPr txBox="1"/>
           <p:nvPr/>
         </p:nvSpPr>
         <p:spPr>
           <a:xfrm>
-            <a:off x="21579840" y="27207464"/>
+            <a:off x="32552640" y="15273527"/>
             <a:ext cx="10607040" cy="365760"/>
           </a:xfrm>
           <a:prstGeom prst="rect">
@@ -5579,20 +5765,20 @@
                 </a:solidFill>
                 <a:latin typeface="Arial"/>
               </a:rPr>
-              <a:t>The longest single pass the platform holds: 141 m of track from 211 fixes, with heading from the IMU over the same 213 seconds. The platform holds 18 passes that carry position.</a:t>
-            </a:r>
-          </a:p>
-        </p:txBody>
-      </p:sp>
-      <p:sp>
-        <p:nvSpPr>
-          <p:cNvPr id="62" name="TextBox 61"/>
+              <a:t>Nothing here is enhanced and nothing is labelled. The rectangle in the cart's down camera is a fixed work-zone overlay: it sits at the same pixels on frames with no vegetation in them at all.</a:t>
+            </a:r>
+          </a:p>
+        </p:txBody>
+      </p:sp>
+      <p:sp>
+        <p:nvSpPr>
+          <p:cNvPr id="66" name="TextBox 65"/>
           <p:cNvSpPr txBox="1"/>
           <p:nvPr/>
         </p:nvSpPr>
         <p:spPr>
           <a:xfrm>
-            <a:off x="32552640" y="7933943"/>
+            <a:off x="32552640" y="16765016"/>
             <a:ext cx="10607040" cy="365760"/>
           </a:xfrm>
           <a:prstGeom prst="rect">
@@ -5621,20 +5807,20 @@
                 </a:solidFill>
                 <a:latin typeface="Times New Roman"/>
               </a:rPr>
-              <a:t>A drive becomes a dataset as it opens</a:t>
-            </a:r>
-          </a:p>
-        </p:txBody>
-      </p:sp>
-      <p:sp>
-        <p:nvSpPr>
-          <p:cNvPr id="63" name="Rectangle 62"/>
+              <a:t>Only one robot has the button</a:t>
+            </a:r>
+          </a:p>
+        </p:txBody>
+      </p:sp>
+      <p:sp>
+        <p:nvSpPr>
+          <p:cNvPr id="67" name="Rectangle 66"/>
           <p:cNvSpPr/>
           <p:nvPr/>
         </p:nvSpPr>
         <p:spPr>
           <a:xfrm>
-            <a:off x="32552640" y="8495284"/>
+            <a:off x="32552640" y="17326355"/>
             <a:ext cx="10607040" cy="27432"/>
           </a:xfrm>
           <a:prstGeom prst="rect">
@@ -5672,13 +5858,13 @@
       </p:sp>
       <p:sp>
         <p:nvSpPr>
-          <p:cNvPr id="64" name="TextBox 63"/>
+          <p:cNvPr id="68" name="TextBox 67"/>
           <p:cNvSpPr txBox="1"/>
           <p:nvPr/>
         </p:nvSpPr>
         <p:spPr>
           <a:xfrm>
-            <a:off x="32552640" y="8824467"/>
+            <a:off x="32552640" y="17655539"/>
             <a:ext cx="10607040" cy="365760"/>
           </a:xfrm>
           <a:prstGeom prst="rect">
@@ -5707,20 +5893,20 @@
                 </a:solidFill>
                 <a:latin typeface="Arial"/>
               </a:rPr>
-              <a:t>A vehicle opens a session and the platform registers it as a governed dataset at that moment, not after the drive ends. Frames and sensor batches arrive over one API key. Robot 241 sends camera, GPS and two IMUs; the laser cart sends camera, laser state, vehicle telemetry and its own detections, and no position at all.</a:t>
-            </a:r>
-          </a:p>
-        </p:txBody>
-      </p:sp>
-      <p:sp>
-        <p:nvSpPr>
-          <p:cNvPr id="65" name="TextBox 64"/>
+              <a:t>The Drive button appears on the 241 project and not on the laser cart's, because the allow-list holds one target. The rover has been dark since 2026-08-28: the platform answers a drive request today with its own offline page. The cart has never been drivable from the platform.</a:t>
+            </a:r>
+          </a:p>
+        </p:txBody>
+      </p:sp>
+      <p:sp>
+        <p:nvSpPr>
+          <p:cNvPr id="69" name="TextBox 68"/>
           <p:cNvSpPr txBox="1"/>
           <p:nvPr/>
         </p:nvSpPr>
         <p:spPr>
           <a:xfrm>
-            <a:off x="32552640" y="10625835"/>
+            <a:off x="32552640" y="19456908"/>
             <a:ext cx="10607040" cy="365760"/>
           </a:xfrm>
           <a:prstGeom prst="rect">
@@ -5749,20 +5935,20 @@
                 </a:solidFill>
                 <a:latin typeface="Times New Roman"/>
               </a:rPr>
-              <a:t>Four frames, as recorded</a:t>
-            </a:r>
-          </a:p>
-        </p:txBody>
-      </p:sp>
-      <p:sp>
-        <p:nvSpPr>
-          <p:cNvPr id="66" name="Rectangle 65"/>
+              <a:t>Which decisions a model makes</a:t>
+            </a:r>
+          </a:p>
+        </p:txBody>
+      </p:sp>
+      <p:sp>
+        <p:nvSpPr>
+          <p:cNvPr id="70" name="Rectangle 69"/>
           <p:cNvSpPr/>
           <p:nvPr/>
         </p:nvSpPr>
         <p:spPr>
           <a:xfrm>
-            <a:off x="32552640" y="11187175"/>
+            <a:off x="32552640" y="20018248"/>
             <a:ext cx="10607040" cy="27432"/>
           </a:xfrm>
           <a:prstGeom prst="rect">
@@ -5798,81 +5984,15 @@
           </a:p>
         </p:txBody>
       </p:sp>
-      <p:pic>
-        <p:nvPicPr>
-          <p:cNvPr id="67" name="Picture 66" descr="l_robots.png"/>
-          <p:cNvPicPr>
-            <a:picLocks noChangeAspect="1"/>
-          </p:cNvPicPr>
-          <p:nvPr/>
-        </p:nvPicPr>
-        <p:blipFill>
-          <a:blip r:embed="rId5"/>
-          <a:stretch>
-            <a:fillRect/>
-          </a:stretch>
-        </p:blipFill>
-        <p:spPr>
-          <a:xfrm>
-            <a:off x="32552640" y="11516359"/>
-            <a:ext cx="10607040" cy="2377440"/>
-          </a:xfrm>
-          <a:prstGeom prst="rect">
-            <a:avLst/>
-          </a:prstGeom>
-        </p:spPr>
-      </p:pic>
-      <p:sp>
-        <p:nvSpPr>
-          <p:cNvPr id="68" name="TextBox 67"/>
+      <p:sp>
+        <p:nvSpPr>
+          <p:cNvPr id="71" name="TextBox 70"/>
           <p:cNvSpPr txBox="1"/>
           <p:nvPr/>
         </p:nvSpPr>
         <p:spPr>
           <a:xfrm>
-            <a:off x="32552640" y="14003527"/>
-            <a:ext cx="10607040" cy="365760"/>
-          </a:xfrm>
-          <a:prstGeom prst="rect">
-            <a:avLst/>
-          </a:prstGeom>
-          <a:noFill/>
-        </p:spPr>
-        <p:txBody>
-          <a:bodyPr wrap="square" lIns="0" rIns="0" tIns="0" bIns="0">
-            <a:spAutoFit/>
-          </a:bodyPr>
-          <a:lstStyle/>
-          <a:p>
-            <a:pPr algn="l">
-              <a:lnSpc>
-                <a:spcPct val="118000"/>
-              </a:lnSpc>
-              <a:spcAft>
-                <a:spcPts val="0"/>
-              </a:spcAft>
-            </a:pPr>
-            <a:r>
-              <a:rPr sz="1600" b="0">
-                <a:solidFill>
-                  <a:srgbClr val="6E6759"/>
-                </a:solidFill>
-                <a:latin typeface="Arial"/>
-              </a:rPr>
-              <a:t>Figure 4.  Frames as recorded, unenhanced. Robot 241 has sent 2,238 frames at 640 x 360 and 1 Hz, the laser cart 427, and 75 of the cart's were taken in a field. None of the 2,686 is labelled. The rectangle in the down camera is the cart's fixed work-zone overlay. It is drawn on every frame, including the ones with no vegetation in them.</a:t>
-            </a:r>
-          </a:p>
-        </p:txBody>
-      </p:sp>
-      <p:sp>
-        <p:nvSpPr>
-          <p:cNvPr id="69" name="TextBox 68"/>
-          <p:cNvSpPr txBox="1"/>
-          <p:nvPr/>
-        </p:nvSpPr>
-        <p:spPr>
-          <a:xfrm>
-            <a:off x="32552640" y="15273527"/>
+            <a:off x="32552640" y="20347432"/>
             <a:ext cx="10607040" cy="365760"/>
           </a:xfrm>
           <a:prstGeom prst="rect">
@@ -5901,20 +6021,20 @@
                 </a:solidFill>
                 <a:latin typeface="Arial"/>
               </a:rPr>
-              <a:t>Nothing here is enhanced and nothing is labelled. The rectangle in the cart's down camera is a fixed work-zone overlay: it sits at the same pixels on frames with no vegetation in them at all.</a:t>
-            </a:r>
-          </a:p>
-        </p:txBody>
-      </p:sp>
-      <p:sp>
-        <p:nvSpPr>
-          <p:cNvPr id="70" name="TextBox 69"/>
+              <a:t>A language model decides what the collector goes after next, judges whether a candidate dataset is on topic, and reviews a finished step. Those run on the cluster, as batch jobs, on open weights. The lab box hosts only the small guide model, and a verdict produced there is marked in its own record as a draft that may not be reported.</a:t>
+            </a:r>
+          </a:p>
+        </p:txBody>
+      </p:sp>
+      <p:sp>
+        <p:nvSpPr>
+          <p:cNvPr id="72" name="TextBox 71"/>
           <p:cNvSpPr txBox="1"/>
           <p:nvPr/>
         </p:nvSpPr>
         <p:spPr>
           <a:xfrm>
-            <a:off x="32552640" y="16765016"/>
+            <a:off x="32552640" y="22458680"/>
             <a:ext cx="10607040" cy="365760"/>
           </a:xfrm>
           <a:prstGeom prst="rect">
@@ -5943,20 +6063,20 @@
                 </a:solidFill>
                 <a:latin typeface="Times New Roman"/>
               </a:rPr>
-              <a:t>Only one robot has the button</a:t>
-            </a:r>
-          </a:p>
-        </p:txBody>
-      </p:sp>
-      <p:sp>
-        <p:nvSpPr>
-          <p:cNvPr id="71" name="Rectangle 70"/>
+              <a:t>Any research field is a project</a:t>
+            </a:r>
+          </a:p>
+        </p:txBody>
+      </p:sp>
+      <p:sp>
+        <p:nvSpPr>
+          <p:cNvPr id="73" name="Rectangle 72"/>
           <p:cNvSpPr/>
           <p:nvPr/>
         </p:nvSpPr>
         <p:spPr>
           <a:xfrm>
-            <a:off x="32552640" y="17326355"/>
+            <a:off x="32552640" y="23020020"/>
             <a:ext cx="10607040" cy="27432"/>
           </a:xfrm>
           <a:prstGeom prst="rect">
@@ -5994,13 +6114,13 @@
       </p:sp>
       <p:sp>
         <p:nvSpPr>
-          <p:cNvPr id="72" name="TextBox 71"/>
+          <p:cNvPr id="74" name="TextBox 73"/>
           <p:cNvSpPr txBox="1"/>
           <p:nvPr/>
         </p:nvSpPr>
         <p:spPr>
           <a:xfrm>
-            <a:off x="32552640" y="17655539"/>
+            <a:off x="32552640" y="23349204"/>
             <a:ext cx="10607040" cy="365760"/>
           </a:xfrm>
           <a:prstGeom prst="rect">
@@ -6029,20 +6149,20 @@
                 </a:solidFill>
                 <a:latin typeface="Arial"/>
               </a:rPr>
-              <a:t>The Drive button appears on the 241 project and not on the laser cart's, because the allow-list holds one target. The rover has been dark since 2026-08-28: the platform answers a drive request today with its own offline page. The cart has never been drivable from the platform.</a:t>
-            </a:r>
-          </a:p>
-        </p:txBody>
-      </p:sp>
-      <p:sp>
-        <p:nvSpPr>
-          <p:cNvPr id="73" name="TextBox 72"/>
+              <a:t>A lab member opens a project for any data type and any field, uploads images, video or sensor logs, and gets an automatic diagnosis before choosing what to do next. Weed detection is one project on this platform. The 241 rover, the laser cart and a Unitree humanoid each have their own.</a:t>
+            </a:r>
+          </a:p>
+        </p:txBody>
+      </p:sp>
+      <p:sp>
+        <p:nvSpPr>
+          <p:cNvPr id="75" name="TextBox 74"/>
           <p:cNvSpPr txBox="1"/>
           <p:nvPr/>
         </p:nvSpPr>
         <p:spPr>
           <a:xfrm>
-            <a:off x="32552640" y="19456908"/>
+            <a:off x="32552640" y="25150572"/>
             <a:ext cx="10607040" cy="365760"/>
           </a:xfrm>
           <a:prstGeom prst="rect">
@@ -6071,20 +6191,20 @@
                 </a:solidFill>
                 <a:latin typeface="Times New Roman"/>
               </a:rPr>
-              <a:t>Which decisions a model makes</a:t>
-            </a:r>
-          </a:p>
-        </p:txBody>
-      </p:sp>
-      <p:sp>
-        <p:nvSpPr>
-          <p:cNvPr id="74" name="Rectangle 73"/>
+              <a:t>Talking back to a robot</a:t>
+            </a:r>
+          </a:p>
+        </p:txBody>
+      </p:sp>
+      <p:sp>
+        <p:nvSpPr>
+          <p:cNvPr id="76" name="Rectangle 75"/>
           <p:cNvSpPr/>
           <p:nvPr/>
         </p:nvSpPr>
         <p:spPr>
           <a:xfrm>
-            <a:off x="32552640" y="20018248"/>
+            <a:off x="32552640" y="25711912"/>
             <a:ext cx="10607040" cy="27432"/>
           </a:xfrm>
           <a:prstGeom prst="rect">
@@ -6122,13 +6242,13 @@
       </p:sp>
       <p:sp>
         <p:nvSpPr>
-          <p:cNvPr id="75" name="TextBox 74"/>
+          <p:cNvPr id="77" name="TextBox 76"/>
           <p:cNvSpPr txBox="1"/>
           <p:nvPr/>
         </p:nvSpPr>
         <p:spPr>
           <a:xfrm>
-            <a:off x="32552640" y="20347432"/>
+            <a:off x="32552640" y="26041096"/>
             <a:ext cx="10607040" cy="365760"/>
           </a:xfrm>
           <a:prstGeom prst="rect">
@@ -6157,69 +6277,27 @@
                 </a:solidFill>
                 <a:latin typeface="Arial"/>
               </a:rPr>
-              <a:t>A language model decides what the collector goes after next, judges whether a candidate dataset is on topic, and reviews a finished step. Those run on the cluster, as batch jobs, on open weights. The lab box hosts only the small guide model, and a verdict produced there is marked in its own record as a draft that may not be reported.</a:t>
-            </a:r>
-          </a:p>
-        </p:txBody>
-      </p:sp>
-      <p:sp>
-        <p:nvSpPr>
-          <p:cNvPr id="76" name="TextBox 75"/>
-          <p:cNvSpPr txBox="1"/>
-          <p:nvPr/>
-        </p:nvSpPr>
-        <p:spPr>
-          <a:xfrm>
-            <a:off x="32552640" y="22458680"/>
-            <a:ext cx="10607040" cy="365760"/>
-          </a:xfrm>
-          <a:prstGeom prst="rect">
-            <a:avLst/>
-          </a:prstGeom>
-          <a:noFill/>
-        </p:spPr>
-        <p:txBody>
-          <a:bodyPr wrap="square" lIns="0" rIns="0" tIns="0" bIns="0">
-            <a:spAutoFit/>
-          </a:bodyPr>
-          <a:lstStyle/>
-          <a:p>
-            <a:pPr algn="l">
-              <a:lnSpc>
-                <a:spcPct val="95000"/>
-              </a:lnSpc>
-              <a:spcAft>
-                <a:spcPts val="0"/>
-              </a:spcAft>
-            </a:pPr>
-            <a:r>
-              <a:rPr sz="3400" b="1">
-                <a:solidFill>
-                  <a:srgbClr val="2B2A26"/>
-                </a:solidFill>
-                <a:latin typeface="Times New Roman"/>
-              </a:rPr>
-              <a:t>Any research field is a project</a:t>
-            </a:r>
-          </a:p>
-        </p:txBody>
-      </p:sp>
-      <p:sp>
-        <p:nvSpPr>
-          <p:cNvPr id="77" name="Rectangle 76"/>
+              <a:t>Besides the drive relay, the platform sends a robot exactly one thing: advisory text. The rover polls for it and shows deterministic warnings about battery, current and temperature. That poll has returned 406 times. No platform code path sends an actuation command to any robot.</a:t>
+            </a:r>
+          </a:p>
+        </p:txBody>
+      </p:sp>
+      <p:sp>
+        <p:nvSpPr>
+          <p:cNvPr id="78" name="Rectangle 77"/>
           <p:cNvSpPr/>
           <p:nvPr/>
         </p:nvSpPr>
         <p:spPr>
           <a:xfrm>
-            <a:off x="32552640" y="23020020"/>
-            <a:ext cx="10607040" cy="27432"/>
+            <a:off x="731520" y="30632400"/>
+            <a:ext cx="42428160" cy="20116"/>
           </a:xfrm>
           <a:prstGeom prst="rect">
             <a:avLst/>
           </a:prstGeom>
           <a:solidFill>
-            <a:srgbClr val="8A4B1E"/>
+            <a:srgbClr val="D8D0BF"/>
           </a:solidFill>
           <a:ln>
             <a:noFill/>
@@ -6250,221 +6328,7 @@
       </p:sp>
       <p:sp>
         <p:nvSpPr>
-          <p:cNvPr id="78" name="TextBox 77"/>
-          <p:cNvSpPr txBox="1"/>
-          <p:nvPr/>
-        </p:nvSpPr>
-        <p:spPr>
-          <a:xfrm>
-            <a:off x="32552640" y="23349204"/>
-            <a:ext cx="10607040" cy="365760"/>
-          </a:xfrm>
-          <a:prstGeom prst="rect">
-            <a:avLst/>
-          </a:prstGeom>
-          <a:noFill/>
-        </p:spPr>
-        <p:txBody>
-          <a:bodyPr wrap="square" lIns="0" rIns="0" tIns="0" bIns="0">
-            <a:spAutoFit/>
-          </a:bodyPr>
-          <a:lstStyle/>
-          <a:p>
-            <a:pPr algn="l">
-              <a:lnSpc>
-                <a:spcPct val="122000"/>
-              </a:lnSpc>
-              <a:spcAft>
-                <a:spcPts val="1400"/>
-              </a:spcAft>
-            </a:pPr>
-            <a:r>
-              <a:rPr sz="2000" b="0">
-                <a:solidFill>
-                  <a:srgbClr val="2B2A26"/>
-                </a:solidFill>
-                <a:latin typeface="Arial"/>
-              </a:rPr>
-              <a:t>A lab member opens a project for any data type and any field, uploads images, video or sensor logs, and gets an automatic diagnosis before choosing what to do next. Weed detection is one project on this platform. The 241 rover, the laser cart and a Unitree humanoid each have their own.</a:t>
-            </a:r>
-          </a:p>
-        </p:txBody>
-      </p:sp>
-      <p:sp>
-        <p:nvSpPr>
           <p:cNvPr id="79" name="TextBox 78"/>
-          <p:cNvSpPr txBox="1"/>
-          <p:nvPr/>
-        </p:nvSpPr>
-        <p:spPr>
-          <a:xfrm>
-            <a:off x="32552640" y="25150572"/>
-            <a:ext cx="10607040" cy="365760"/>
-          </a:xfrm>
-          <a:prstGeom prst="rect">
-            <a:avLst/>
-          </a:prstGeom>
-          <a:noFill/>
-        </p:spPr>
-        <p:txBody>
-          <a:bodyPr wrap="square" lIns="0" rIns="0" tIns="0" bIns="0">
-            <a:spAutoFit/>
-          </a:bodyPr>
-          <a:lstStyle/>
-          <a:p>
-            <a:pPr algn="l">
-              <a:lnSpc>
-                <a:spcPct val="95000"/>
-              </a:lnSpc>
-              <a:spcAft>
-                <a:spcPts val="0"/>
-              </a:spcAft>
-            </a:pPr>
-            <a:r>
-              <a:rPr sz="3400" b="1">
-                <a:solidFill>
-                  <a:srgbClr val="2B2A26"/>
-                </a:solidFill>
-                <a:latin typeface="Times New Roman"/>
-              </a:rPr>
-              <a:t>Talking back to a robot</a:t>
-            </a:r>
-          </a:p>
-        </p:txBody>
-      </p:sp>
-      <p:sp>
-        <p:nvSpPr>
-          <p:cNvPr id="80" name="Rectangle 79"/>
-          <p:cNvSpPr/>
-          <p:nvPr/>
-        </p:nvSpPr>
-        <p:spPr>
-          <a:xfrm>
-            <a:off x="32552640" y="25711912"/>
-            <a:ext cx="10607040" cy="27432"/>
-          </a:xfrm>
-          <a:prstGeom prst="rect">
-            <a:avLst/>
-          </a:prstGeom>
-          <a:solidFill>
-            <a:srgbClr val="8A4B1E"/>
-          </a:solidFill>
-          <a:ln>
-            <a:noFill/>
-          </a:ln>
-          <a:effectLst/>
-        </p:spPr>
-        <p:style>
-          <a:lnRef idx="1">
-            <a:schemeClr val="accent1"/>
-          </a:lnRef>
-          <a:fillRef idx="3">
-            <a:schemeClr val="accent1"/>
-          </a:fillRef>
-          <a:effectRef idx="2">
-            <a:schemeClr val="accent1"/>
-          </a:effectRef>
-          <a:fontRef idx="minor">
-            <a:schemeClr val="lt1"/>
-          </a:fontRef>
-        </p:style>
-        <p:txBody>
-          <a:bodyPr rtlCol="0" anchor="ctr"/>
-          <a:lstStyle/>
-          <a:p>
-            <a:pPr algn="ctr"/>
-          </a:p>
-        </p:txBody>
-      </p:sp>
-      <p:sp>
-        <p:nvSpPr>
-          <p:cNvPr id="81" name="TextBox 80"/>
-          <p:cNvSpPr txBox="1"/>
-          <p:nvPr/>
-        </p:nvSpPr>
-        <p:spPr>
-          <a:xfrm>
-            <a:off x="32552640" y="26041096"/>
-            <a:ext cx="10607040" cy="365760"/>
-          </a:xfrm>
-          <a:prstGeom prst="rect">
-            <a:avLst/>
-          </a:prstGeom>
-          <a:noFill/>
-        </p:spPr>
-        <p:txBody>
-          <a:bodyPr wrap="square" lIns="0" rIns="0" tIns="0" bIns="0">
-            <a:spAutoFit/>
-          </a:bodyPr>
-          <a:lstStyle/>
-          <a:p>
-            <a:pPr algn="l">
-              <a:lnSpc>
-                <a:spcPct val="122000"/>
-              </a:lnSpc>
-              <a:spcAft>
-                <a:spcPts val="1400"/>
-              </a:spcAft>
-            </a:pPr>
-            <a:r>
-              <a:rPr sz="2000" b="0">
-                <a:solidFill>
-                  <a:srgbClr val="2B2A26"/>
-                </a:solidFill>
-                <a:latin typeface="Arial"/>
-              </a:rPr>
-              <a:t>Besides the drive relay, the platform sends a robot exactly one thing: advisory text. The rover polls for it and shows deterministic warnings about battery, current and temperature. That poll has returned 406 times. No platform code path sends an actuation command to any robot.</a:t>
-            </a:r>
-          </a:p>
-        </p:txBody>
-      </p:sp>
-      <p:sp>
-        <p:nvSpPr>
-          <p:cNvPr id="82" name="Rectangle 81"/>
-          <p:cNvSpPr/>
-          <p:nvPr/>
-        </p:nvSpPr>
-        <p:spPr>
-          <a:xfrm>
-            <a:off x="731520" y="30632400"/>
-            <a:ext cx="42428160" cy="20116"/>
-          </a:xfrm>
-          <a:prstGeom prst="rect">
-            <a:avLst/>
-          </a:prstGeom>
-          <a:solidFill>
-            <a:srgbClr val="D8D0BF"/>
-          </a:solidFill>
-          <a:ln>
-            <a:noFill/>
-          </a:ln>
-          <a:effectLst/>
-        </p:spPr>
-        <p:style>
-          <a:lnRef idx="1">
-            <a:schemeClr val="accent1"/>
-          </a:lnRef>
-          <a:fillRef idx="3">
-            <a:schemeClr val="accent1"/>
-          </a:fillRef>
-          <a:effectRef idx="2">
-            <a:schemeClr val="accent1"/>
-          </a:effectRef>
-          <a:fontRef idx="minor">
-            <a:schemeClr val="lt1"/>
-          </a:fontRef>
-        </p:style>
-        <p:txBody>
-          <a:bodyPr rtlCol="0" anchor="ctr"/>
-          <a:lstStyle/>
-          <a:p>
-            <a:pPr algn="ctr"/>
-          </a:p>
-        </p:txBody>
-      </p:sp>
-      <p:sp>
-        <p:nvSpPr>
-          <p:cNvPr id="83" name="TextBox 82"/>
           <p:cNvSpPr txBox="1"/>
           <p:nvPr/>
         </p:nvSpPr>
@@ -6506,7 +6370,7 @@
       </p:sp>
       <p:sp>
         <p:nvSpPr>
-          <p:cNvPr id="84" name="TextBox 83"/>
+          <p:cNvPr id="80" name="TextBox 79"/>
           <p:cNvSpPr txBox="1"/>
           <p:nvPr/>
         </p:nvSpPr>
@@ -6548,7 +6412,7 @@
       </p:sp>
       <p:sp>
         <p:nvSpPr>
-          <p:cNvPr id="85" name="TextBox 84"/>
+          <p:cNvPr id="81" name="TextBox 80"/>
           <p:cNvSpPr txBox="1"/>
           <p:nvPr/>
         </p:nvSpPr>
